--- a/pptx-report/template.pptx
+++ b/pptx-report/template.pptx
@@ -11773,125 +11773,6 @@
           <a:xfrm>
             <a:off x="4274769" y="-100248"/>
             <a:ext cx="2594501" cy="831108"/>
-          </a:xfrm>
-          <a:prstGeom prst="rect">
-            <a:avLst/>
-          </a:prstGeom>
-        </p:spPr>
-      </p:pic>
-      <p:pic>
-        <p:nvPicPr>
-          <p:cNvPr id="10" name="Picture 9">
-            <a:extLst>
-              <a:ext uri="{FF2B5EF4-FFF2-40B4-BE49-F238E27FC236}">
-                <a16:creationId xmlns:a16="http://schemas.microsoft.com/office/drawing/2014/main" id="{2FE6628C-6966-F194-AA86-ADF17934EEB3}"/>
-              </a:ext>
-            </a:extLst>
-          </p:cNvPr>
-          <p:cNvPicPr>
-            <a:picLocks noChangeAspect="1" noChangeArrowheads="1"/>
-          </p:cNvPicPr>
-          <p:nvPr/>
-        </p:nvPicPr>
-        <p:blipFill>
-          <a:blip r:embed="rId6">
-            <a:extLst>
-              <a:ext uri="{28A0092B-C50C-407E-A947-70E740481C1C}">
-                <a14:useLocalDpi xmlns:a14="http://schemas.microsoft.com/office/drawing/2010/main" val="0"/>
-              </a:ext>
-            </a:extLst>
-          </a:blip>
-          <a:srcRect/>
-          <a:stretch>
-            <a:fillRect/>
-          </a:stretch>
-        </p:blipFill>
-        <p:spPr bwMode="auto">
-          <a:xfrm>
-            <a:off x="672879" y="881942"/>
-            <a:ext cx="546352" cy="195126"/>
-          </a:xfrm>
-          <a:prstGeom prst="rect">
-            <a:avLst/>
-          </a:prstGeom>
-          <a:noFill/>
-          <a:extLst>
-            <a:ext uri="{909E8E84-426E-40DD-AFC4-6F175D3DCCD1}">
-              <a14:hiddenFill xmlns:a14="http://schemas.microsoft.com/office/drawing/2010/main">
-                <a:solidFill>
-                  <a:srgbClr val="FFFFFF"/>
-                </a:solidFill>
-              </a14:hiddenFill>
-            </a:ext>
-          </a:extLst>
-        </p:spPr>
-      </p:pic>
-      <p:pic>
-        <p:nvPicPr>
-          <p:cNvPr id="11" name="Picture 10">
-            <a:extLst>
-              <a:ext uri="{FF2B5EF4-FFF2-40B4-BE49-F238E27FC236}">
-                <a16:creationId xmlns:a16="http://schemas.microsoft.com/office/drawing/2014/main" id="{3F09177F-1133-B832-4441-F04C219972B4}"/>
-              </a:ext>
-            </a:extLst>
-          </p:cNvPr>
-          <p:cNvPicPr>
-            <a:picLocks noChangeAspect="1"/>
-          </p:cNvPicPr>
-          <p:nvPr/>
-        </p:nvPicPr>
-        <p:blipFill>
-          <a:blip r:embed="rId5">
-            <a:extLst>
-              <a:ext uri="{28A0092B-C50C-407E-A947-70E740481C1C}">
-                <a14:useLocalDpi xmlns:a14="http://schemas.microsoft.com/office/drawing/2010/main" val="0"/>
-              </a:ext>
-            </a:extLst>
-          </a:blip>
-          <a:stretch>
-            <a:fillRect/>
-          </a:stretch>
-        </p:blipFill>
-        <p:spPr>
-          <a:xfrm>
-            <a:off x="4303154" y="793686"/>
-            <a:ext cx="1038690" cy="332728"/>
-          </a:xfrm>
-          <a:prstGeom prst="rect">
-            <a:avLst/>
-          </a:prstGeom>
-        </p:spPr>
-      </p:pic>
-      <p:pic>
-        <p:nvPicPr>
-          <p:cNvPr id="16" name="Picture 15">
-            <a:extLst>
-              <a:ext uri="{FF2B5EF4-FFF2-40B4-BE49-F238E27FC236}">
-                <a16:creationId xmlns:a16="http://schemas.microsoft.com/office/drawing/2014/main" id="{68F4BD61-318E-F522-7FE0-5EA80C193860}"/>
-              </a:ext>
-            </a:extLst>
-          </p:cNvPr>
-          <p:cNvPicPr>
-            <a:picLocks noChangeAspect="1"/>
-          </p:cNvPicPr>
-          <p:nvPr/>
-        </p:nvPicPr>
-        <p:blipFill>
-          <a:blip r:embed="rId4">
-            <a:extLst>
-              <a:ext uri="{28A0092B-C50C-407E-A947-70E740481C1C}">
-                <a14:useLocalDpi xmlns:a14="http://schemas.microsoft.com/office/drawing/2010/main" val="0"/>
-              </a:ext>
-            </a:extLst>
-          </a:blip>
-          <a:stretch>
-            <a:fillRect/>
-          </a:stretch>
-        </p:blipFill>
-        <p:spPr>
-          <a:xfrm>
-            <a:off x="8277418" y="878165"/>
-            <a:ext cx="682721" cy="163771"/>
           </a:xfrm>
           <a:prstGeom prst="rect">
             <a:avLst/>
@@ -12895,7 +12776,7 @@
             </a:r>
             <a:r>
               <a:rPr lang="tr-TR" sz="1300" dirty="0"/>
-              <a:t>106</a:t>
+              <a:t>{{S9_EMAIL_SB_COUNT}}</a:t>
             </a:r>
             <a:r>
               <a:rPr lang="tr-TR" sz="1300" dirty="0">
@@ -12935,7 +12816,7 @@
                   <a:schemeClr val="tx1"/>
                 </a:solidFill>
               </a:rPr>
-              <a:t> 00:12:00</a:t>
+              <a:t> {{S9_EMAIL_SB_TIME}}</a:t>
             </a:r>
             <a:br>
               <a:rPr lang="tr-TR" sz="1300" dirty="0">
@@ -12966,7 +12847,7 @@
                   <a:schemeClr val="tx1"/>
                 </a:solidFill>
               </a:rPr>
-              <a:t>: 207 / First resolution time median: 00:16:49</a:t>
+              <a:t>: {{S9_EMAIL_BS_COUNT}} / First resolution time median: {{S9_EMAIL_BS_TIME}}</a:t>
             </a:r>
             <a:br>
               <a:rPr lang="tr-TR" sz="1300" dirty="0"/>
@@ -13001,7 +12882,7 @@
             </a:r>
             <a:r>
               <a:rPr lang="tr-TR" sz="1300" dirty="0"/>
-              <a:t> 0 </a:t>
+              <a:t> {{S9_EMAIL_TB_COUNT}} </a:t>
             </a:r>
             <a:r>
               <a:rPr lang="en-US" sz="1300" dirty="0">
@@ -13017,7 +12898,7 @@
                   <a:schemeClr val="tx1"/>
                 </a:solidFill>
               </a:rPr>
-              <a:t> : 00:00:00</a:t>
+              <a:t> : {{S9_EMAIL_TB_TIME}}</a:t>
             </a:r>
             <a:br>
               <a:rPr lang="tr-TR" sz="1300" dirty="0">
@@ -13314,7 +13195,7 @@
                   <a:srgbClr val="00B050"/>
                 </a:solidFill>
               </a:rPr>
-              <a:t>41s</a:t>
+              <a:t>{{S9_RESPONSE}}</a:t>
             </a:r>
           </a:p>
           <a:p>
@@ -13332,7 +13213,7 @@
                   <a:srgbClr val="00B050"/>
                 </a:solidFill>
               </a:rPr>
-              <a:t>6m 51s</a:t>
+              <a:t>{{S9_DURATION}}</a:t>
             </a:r>
           </a:p>
           <a:p>
@@ -13350,7 +13231,7 @@
                   <a:srgbClr val="00B050"/>
                 </a:solidFill>
               </a:rPr>
-              <a:t> 4,06</a:t>
+              <a:t> {{S9_SATISFACTION}}</a:t>
             </a:r>
           </a:p>
           <a:p>
@@ -13376,7 +13257,7 @@
                   <a:srgbClr val="FF0000"/>
                 </a:solidFill>
               </a:rPr>
-              <a:t> 1m 29s</a:t>
+              <a:t> {{S9_WAIT_SERVED}}</a:t>
             </a:r>
           </a:p>
           <a:p>
@@ -13398,7 +13279,7 @@
                   <a:srgbClr val="FF0000"/>
                 </a:solidFill>
               </a:rPr>
-              <a:t>1m 43</a:t>
+              <a:t>{{S9_WAIT_MISSED}}</a:t>
             </a:r>
             <a:r>
               <a:rPr lang="tr-TR" sz="1400" dirty="0">
@@ -13406,7 +13287,7 @@
                   <a:srgbClr val="FF0000"/>
                 </a:solidFill>
               </a:rPr>
-              <a:t>s</a:t>
+              <a:t/>
             </a:r>
           </a:p>
           <a:p>
@@ -13424,7 +13305,7 @@
                   <a:srgbClr val="00B050"/>
                 </a:solidFill>
               </a:rPr>
-              <a:t>97,48%</a:t>
+              <a:t>{{S9_ACCEPTANCE}}</a:t>
             </a:r>
           </a:p>
           <a:p>
@@ -13442,7 +13323,7 @@
                   <a:srgbClr val="00B050"/>
                 </a:solidFill>
               </a:rPr>
-              <a:t> 8,67%</a:t>
+              <a:t> {{S9_RATED_PCT}}</a:t>
             </a:r>
           </a:p>
           <a:p>
@@ -13592,7 +13473,7 @@
                   </a:schemeClr>
                 </a:solidFill>
               </a:rPr>
-              <a:t> 252</a:t>
+              <a:t> {{S9_CALL_BS_ATTEMPTS}}</a:t>
             </a:r>
             <a:br>
               <a:rPr lang="en-US" sz="1300" dirty="0">
@@ -13658,7 +13539,7 @@
                   </a:schemeClr>
                 </a:solidFill>
               </a:rPr>
-              <a:t> 95 </a:t>
+              <a:t> {{S9_CALL_BS_REACHED}} </a:t>
             </a:r>
             <a:r>
               <a:rPr lang="tr-TR" sz="1300" dirty="0">
@@ -13683,7 +13564,7 @@
                   </a:schemeClr>
                 </a:solidFill>
               </a:rPr>
-              <a:t>37</a:t>
+              <a:t>{{S9_CALL_BS_REACHED_PCT}}</a:t>
             </a:r>
             <a:r>
               <a:rPr lang="tr-TR" sz="1300" dirty="0">
@@ -13697,7 +13578,7 @@
                 <a:ea typeface="+mn-ea"/>
                 <a:cs typeface="+mn-cs"/>
               </a:rPr>
-              <a:t>.70%)</a:t>
+              <a:t>)</a:t>
             </a:r>
             <a:br>
               <a:rPr lang="en-US" sz="1300" dirty="0">
@@ -13777,7 +13658,7 @@
                   </a:schemeClr>
                 </a:solidFill>
               </a:rPr>
-              <a:t>157</a:t>
+              <a:t>{{S9_CALL_BS_NOTREACHED}}</a:t>
             </a:r>
             <a:r>
               <a:rPr lang="tr-TR" sz="1300" dirty="0">
@@ -13802,7 +13683,7 @@
                   </a:schemeClr>
                 </a:solidFill>
               </a:rPr>
-              <a:t>62</a:t>
+              <a:t>{{S9_CALL_BS_NOTREACHED_PCT}}</a:t>
             </a:r>
             <a:r>
               <a:rPr lang="tr-TR" sz="1300" dirty="0">
@@ -13816,7 +13697,7 @@
                 <a:ea typeface="+mn-ea"/>
                 <a:cs typeface="+mn-cs"/>
               </a:rPr>
-              <a:t>.30%)</a:t>
+              <a:t>)</a:t>
             </a:r>
             <a:endParaRPr lang="tr-TR" sz="1300" dirty="0"/>
           </a:p>
@@ -13921,7 +13802,7 @@
                 <a:ea typeface="+mn-ea"/>
                 <a:cs typeface="+mn-cs"/>
               </a:rPr>
-              <a:t> 493</a:t>
+              <a:t> {{S9_CALL_SB_ATTEMPTS}}</a:t>
             </a:r>
           </a:p>
           <a:p>
@@ -13976,7 +13857,7 @@
                   </a:schemeClr>
                 </a:solidFill>
               </a:rPr>
-              <a:t>191</a:t>
+              <a:t>{{S9_CALL_SB_REACHED}}</a:t>
             </a:r>
             <a:r>
               <a:rPr lang="tr-TR" sz="1300" dirty="0">
@@ -13990,7 +13871,7 @@
                 <a:ea typeface="+mn-ea"/>
                 <a:cs typeface="+mn-cs"/>
               </a:rPr>
-              <a:t> (38.54%)</a:t>
+              <a:t> ({{S9_CALL_SB_REACHED_PCT}})</a:t>
             </a:r>
             <a:br>
               <a:rPr lang="en-US" sz="1300" dirty="0">
@@ -14070,7 +13951,7 @@
                   </a:schemeClr>
                 </a:solidFill>
               </a:rPr>
-              <a:t>302</a:t>
+              <a:t>{{S9_CALL_SB_NOTREACHED}}</a:t>
             </a:r>
             <a:r>
               <a:rPr lang="tr-TR" sz="1300" dirty="0">
@@ -14084,7 +13965,7 @@
                 <a:ea typeface="+mn-ea"/>
                 <a:cs typeface="+mn-cs"/>
               </a:rPr>
-              <a:t> (61.46%)</a:t>
+              <a:t> ({{S9_CALL_SB_NOTREACHED_PCT}})</a:t>
             </a:r>
             <a:endParaRPr lang="tr-TR" sz="1300" dirty="0"/>
           </a:p>
@@ -14193,7 +14074,7 @@
                 <a:ea typeface="+mn-ea"/>
                 <a:cs typeface="+mn-cs"/>
               </a:rPr>
-              <a:t> 73</a:t>
+              <a:t> {{S9_CALL_TB_ATTEMPTS}}</a:t>
             </a:r>
             <a:endParaRPr lang="tr-TR" sz="1300" dirty="0">
               <a:solidFill>
@@ -14245,7 +14126,7 @@
                 <a:ea typeface="+mn-ea"/>
                 <a:cs typeface="+mn-cs"/>
               </a:rPr>
-              <a:t> 26 (</a:t>
+              <a:t> {{S9_CALL_TB_REACHED}} (</a:t>
             </a:r>
             <a:r>
               <a:rPr lang="tr-TR" sz="1300" dirty="0">
@@ -14256,7 +14137,7 @@
                   </a:schemeClr>
                 </a:solidFill>
               </a:rPr>
-              <a:t>35.62</a:t>
+              <a:t>{{S9_CALL_TB_REACHED_PCT}}</a:t>
             </a:r>
             <a:r>
               <a:rPr lang="tr-TR" sz="1300" dirty="0">
@@ -14270,7 +14151,7 @@
                 <a:ea typeface="+mn-ea"/>
                 <a:cs typeface="+mn-cs"/>
               </a:rPr>
-              <a:t>%)</a:t>
+              <a:t>)</a:t>
             </a:r>
             <a:br>
               <a:rPr lang="en-US" sz="1300" dirty="0">
@@ -14361,7 +14242,7 @@
                   </a:schemeClr>
                 </a:solidFill>
               </a:rPr>
-              <a:t>47</a:t>
+              <a:t>{{S9_CALL_TB_NOTREACHED}}</a:t>
             </a:r>
             <a:r>
               <a:rPr lang="tr-TR" sz="1300" dirty="0">
@@ -14375,7 +14256,7 @@
                 <a:ea typeface="+mn-ea"/>
                 <a:cs typeface="+mn-cs"/>
               </a:rPr>
-              <a:t> (64.38%)</a:t>
+              <a:t> ({{S9_CALL_TB_NOTREACHED_PCT}})</a:t>
             </a:r>
             <a:endParaRPr lang="tr-TR" sz="1300" dirty="0"/>
           </a:p>
@@ -14592,7 +14473,7 @@
                 <a:effectLst/>
                 <a:latin typeface="Menlo"/>
               </a:rPr>
-              <a:t>207 </a:t>
+              <a:t/>
             </a:r>
             <a:endParaRPr kumimoji="0" lang="en-US" altLang="en-US" sz="1800" b="0" i="0" u="none" strike="noStrike" cap="none" normalizeH="0" baseline="0">
               <a:ln>

--- a/pptx-report/template.pptx
+++ b/pptx-report/template.pptx
@@ -5375,8 +5375,8 @@
         </p:nvSpPr>
         <p:spPr>
           <a:xfrm>
-            <a:off x="9832063" y="1390434"/>
-            <a:ext cx="2255146" cy="3970318"/>
+            <a:off x="9832063" y="4544568"/>
+            <a:ext cx="2255146" cy="813816"/>
           </a:xfrm>
           <a:prstGeom prst="rect">
             <a:avLst/>
@@ -5388,67 +5388,6 @@
             <a:spAutoFit/>
           </a:bodyPr>
           <a:lstStyle/>
-          <a:p>
-            <a:pPr marL="285750" indent="-285750">
-              <a:buFont typeface="Arial" panose="020B0604020202020204" pitchFamily="34" charset="0"/>
-              <a:buChar char="•"/>
-            </a:pPr>
-            <a:r>
-              <a:rPr lang="en-US" sz="1200" dirty="0"/>
-              <a:t>Explanation;</a:t>
-            </a:r>
-            <a:endParaRPr lang="tr-TR" sz="1200" b="1" dirty="0"/>
-          </a:p>
-          <a:p>
-            <a:r>
-              <a:rPr lang="tr-TR" sz="1200" b="1" dirty="0"/>
-              <a:t>      - Total Chats: {{S2_TOTAL}}</a:t>
-            </a:r>
-            <a:endParaRPr lang="tr-TR" sz="1200" dirty="0"/>
-          </a:p>
-          <a:p>
-            <a:r>
-              <a:rPr lang="tr-TR" sz="1200" b="1" dirty="0"/>
-              <a:t>      - Total Served Chats: {{S2_SERVED}}</a:t>
-            </a:r>
-            <a:endParaRPr lang="tr-TR" sz="1200" dirty="0"/>
-          </a:p>
-          <a:p>
-            <a:pPr>
-              <a:buNone/>
-            </a:pPr>
-            <a:r>
-              <a:rPr lang="tr-TR" sz="1200" b="1" dirty="0"/>
-              <a:t>      - Total Missed Chats:</a:t>
-            </a:r>
-            <a:r>
-              <a:rPr lang="en-US" sz="1200" b="1" dirty="0"/>
-              <a:t> </a:t>
-            </a:r>
-            <a:r>
-              <a:rPr lang="tr-TR" sz="1200" b="1" dirty="0"/>
-              <a:t>{{S2_MISSED}}</a:t>
-            </a:r>
-            <a:br>
-              <a:rPr lang="tr-TR" sz="1200" b="1" dirty="0"/>
-            </a:br>
-            <a:r>
-              <a:rPr lang="tr-TR" sz="1200" b="1" dirty="0"/>
-              <a:t>      - </a:t>
-            </a:r>
-            <a:r>
-              <a:rPr lang="en-US" sz="1200" b="1" dirty="0"/>
-              <a:t>Success</a:t>
-            </a:r>
-            <a:r>
-              <a:rPr lang="tr-TR" sz="1200" b="1" dirty="0"/>
-              <a:t>: {{S2_SUCCESS}}</a:t>
-            </a:r>
-            <a:r>
-              <a:rPr lang="tr-TR" sz="1200" dirty="0"/>
-              <a:t>%</a:t>
-            </a:r>
-          </a:p>
           <a:p>
             <a:br>
               <a:rPr lang="tr-TR" sz="1200" b="1" dirty="0">

--- a/pptx-report/template.pptx
+++ b/pptx-report/template.pptx
@@ -3400,14 +3400,14 @@
         </p:nvSpPr>
         <p:spPr>
           <a:xfrm>
-            <a:off x="3175" y="6400800"/>
-            <a:ext cx="12188825" cy="457200"/>
+            <a:off x="3175" y="6784848"/>
+            <a:ext cx="12188825" cy="54864"/>
           </a:xfrm>
           <a:prstGeom prst="rect">
             <a:avLst/>
           </a:prstGeom>
           <a:solidFill>
-            <a:schemeClr val="accent2"/>
+            <a:srgbClr val="1B2436"/>
           </a:solidFill>
           <a:ln>
             <a:noFill/>
@@ -3438,14 +3438,14 @@
         </p:nvSpPr>
         <p:spPr>
           <a:xfrm>
-            <a:off x="15" y="6334316"/>
-            <a:ext cx="12188825" cy="64008"/>
+            <a:off x="15" y="6729984"/>
+            <a:ext cx="12188825" cy="54864"/>
           </a:xfrm>
           <a:prstGeom prst="rect">
             <a:avLst/>
           </a:prstGeom>
           <a:solidFill>
-            <a:schemeClr val="accent1"/>
+            <a:srgbClr val="1B2436"/>
           </a:solidFill>
           <a:ln>
             <a:noFill/>
@@ -5236,6 +5236,14 @@
 <file path=ppt/slides/slide2.xml><?xml version="1.0" encoding="utf-8"?>
 <p:sld xmlns:a="http://schemas.openxmlformats.org/drawingml/2006/main" xmlns:r="http://schemas.openxmlformats.org/officeDocument/2006/relationships" xmlns:p="http://schemas.openxmlformats.org/presentationml/2006/main">
   <p:cSld>
+    <p:bg>
+      <p:bgPr>
+        <a:solidFill>
+          <a:srgbClr val="FFFFFF"/>
+        </a:solidFill>
+        <a:effectLst/>
+      </p:bgPr>
+    </p:bg>
     <p:spTree>
       <p:nvGrpSpPr>
         <p:cNvPr id="1" name="">
@@ -5256,6 +5264,50 @@
           <a:chExt cx="0" cy="0"/>
         </a:xfrm>
       </p:grpSpPr>
+      <p:sp>
+        <p:nvSpPr>
+          <p:cNvPr id="32" name="Rectangle 31"/>
+          <p:cNvSpPr/>
+          <p:nvPr/>
+        </p:nvSpPr>
+        <p:spPr>
+          <a:xfrm>
+            <a:off x="0" y="0"/>
+            <a:ext cx="12188952" cy="1051560"/>
+          </a:xfrm>
+          <a:prstGeom prst="rect">
+            <a:avLst/>
+          </a:prstGeom>
+          <a:solidFill>
+            <a:srgbClr val="1B2436"/>
+          </a:solidFill>
+          <a:ln>
+            <a:noFill/>
+          </a:ln>
+          <a:effectLst/>
+        </p:spPr>
+        <p:style>
+          <a:lnRef idx="1">
+            <a:schemeClr val="accent1"/>
+          </a:lnRef>
+          <a:fillRef idx="3">
+            <a:schemeClr val="accent1"/>
+          </a:fillRef>
+          <a:effectRef idx="2">
+            <a:schemeClr val="accent1"/>
+          </a:effectRef>
+          <a:fontRef idx="minor">
+            <a:schemeClr val="lt1"/>
+          </a:fontRef>
+        </p:style>
+        <p:txBody>
+          <a:bodyPr rtlCol="0" anchor="ctr"/>
+          <a:lstStyle/>
+          <a:p>
+            <a:pPr algn="ctr"/>
+          </a:p>
+        </p:txBody>
+      </p:sp>
       <p:sp>
         <p:nvSpPr>
           <p:cNvPr id="7" name="Title 6">
@@ -6136,6 +6188,14 @@
 <file path=ppt/slides/slide3.xml><?xml version="1.0" encoding="utf-8"?>
 <p:sld xmlns:a="http://schemas.openxmlformats.org/drawingml/2006/main" xmlns:r="http://schemas.openxmlformats.org/officeDocument/2006/relationships" xmlns:p="http://schemas.openxmlformats.org/presentationml/2006/main">
   <p:cSld>
+    <p:bg>
+      <p:bgPr>
+        <a:solidFill>
+          <a:srgbClr val="FFFFFF"/>
+        </a:solidFill>
+        <a:effectLst/>
+      </p:bgPr>
+    </p:bg>
     <p:spTree>
       <p:nvGrpSpPr>
         <p:cNvPr id="1" name=""/>
@@ -6150,6 +6210,50 @@
           <a:chExt cx="0" cy="0"/>
         </a:xfrm>
       </p:grpSpPr>
+      <p:sp>
+        <p:nvSpPr>
+          <p:cNvPr id="17" name="Rectangle 16"/>
+          <p:cNvSpPr/>
+          <p:nvPr/>
+        </p:nvSpPr>
+        <p:spPr>
+          <a:xfrm>
+            <a:off x="0" y="0"/>
+            <a:ext cx="12188952" cy="1051560"/>
+          </a:xfrm>
+          <a:prstGeom prst="rect">
+            <a:avLst/>
+          </a:prstGeom>
+          <a:solidFill>
+            <a:srgbClr val="1B2436"/>
+          </a:solidFill>
+          <a:ln>
+            <a:noFill/>
+          </a:ln>
+          <a:effectLst/>
+        </p:spPr>
+        <p:style>
+          <a:lnRef idx="1">
+            <a:schemeClr val="accent1"/>
+          </a:lnRef>
+          <a:fillRef idx="3">
+            <a:schemeClr val="accent1"/>
+          </a:fillRef>
+          <a:effectRef idx="2">
+            <a:schemeClr val="accent1"/>
+          </a:effectRef>
+          <a:fontRef idx="minor">
+            <a:schemeClr val="lt1"/>
+          </a:fontRef>
+        </p:style>
+        <p:txBody>
+          <a:bodyPr rtlCol="0" anchor="ctr"/>
+          <a:lstStyle/>
+          <a:p>
+            <a:pPr algn="ctr"/>
+          </a:p>
+        </p:txBody>
+      </p:sp>
       <p:sp>
         <p:nvSpPr>
           <p:cNvPr id="2" name="Title 1">
@@ -6524,6 +6628,14 @@
 <file path=ppt/slides/slide4.xml><?xml version="1.0" encoding="utf-8"?>
 <p:sld xmlns:a="http://schemas.openxmlformats.org/drawingml/2006/main" xmlns:r="http://schemas.openxmlformats.org/officeDocument/2006/relationships" xmlns:p="http://schemas.openxmlformats.org/presentationml/2006/main">
   <p:cSld>
+    <p:bg>
+      <p:bgPr>
+        <a:solidFill>
+          <a:srgbClr val="FFFFFF"/>
+        </a:solidFill>
+        <a:effectLst/>
+      </p:bgPr>
+    </p:bg>
     <p:spTree>
       <p:nvGrpSpPr>
         <p:cNvPr id="1" name=""/>
@@ -6538,6 +6650,50 @@
           <a:chExt cx="0" cy="0"/>
         </a:xfrm>
       </p:grpSpPr>
+      <p:sp>
+        <p:nvSpPr>
+          <p:cNvPr id="12" name="Rectangle 11"/>
+          <p:cNvSpPr/>
+          <p:nvPr/>
+        </p:nvSpPr>
+        <p:spPr>
+          <a:xfrm>
+            <a:off x="0" y="0"/>
+            <a:ext cx="12188952" cy="1051560"/>
+          </a:xfrm>
+          <a:prstGeom prst="rect">
+            <a:avLst/>
+          </a:prstGeom>
+          <a:solidFill>
+            <a:srgbClr val="1B2436"/>
+          </a:solidFill>
+          <a:ln>
+            <a:noFill/>
+          </a:ln>
+          <a:effectLst/>
+        </p:spPr>
+        <p:style>
+          <a:lnRef idx="1">
+            <a:schemeClr val="accent1"/>
+          </a:lnRef>
+          <a:fillRef idx="3">
+            <a:schemeClr val="accent1"/>
+          </a:fillRef>
+          <a:effectRef idx="2">
+            <a:schemeClr val="accent1"/>
+          </a:effectRef>
+          <a:fontRef idx="minor">
+            <a:schemeClr val="lt1"/>
+          </a:fontRef>
+        </p:style>
+        <p:txBody>
+          <a:bodyPr rtlCol="0" anchor="ctr"/>
+          <a:lstStyle/>
+          <a:p>
+            <a:pPr algn="ctr"/>
+          </a:p>
+        </p:txBody>
+      </p:sp>
       <p:sp>
         <p:nvSpPr>
           <p:cNvPr id="2" name="Title 1">
@@ -6920,6 +7076,14 @@
 <file path=ppt/slides/slide5.xml><?xml version="1.0" encoding="utf-8"?>
 <p:sld xmlns:a="http://schemas.openxmlformats.org/drawingml/2006/main" xmlns:r="http://schemas.openxmlformats.org/officeDocument/2006/relationships" xmlns:p="http://schemas.openxmlformats.org/presentationml/2006/main">
   <p:cSld>
+    <p:bg>
+      <p:bgPr>
+        <a:solidFill>
+          <a:srgbClr val="FFFFFF"/>
+        </a:solidFill>
+        <a:effectLst/>
+      </p:bgPr>
+    </p:bg>
     <p:spTree>
       <p:nvGrpSpPr>
         <p:cNvPr id="1" name="">
@@ -6940,6 +7104,50 @@
           <a:chExt cx="0" cy="0"/>
         </a:xfrm>
       </p:grpSpPr>
+      <p:sp>
+        <p:nvSpPr>
+          <p:cNvPr id="21" name="Rectangle 20"/>
+          <p:cNvSpPr/>
+          <p:nvPr/>
+        </p:nvSpPr>
+        <p:spPr>
+          <a:xfrm>
+            <a:off x="0" y="0"/>
+            <a:ext cx="12188952" cy="1051560"/>
+          </a:xfrm>
+          <a:prstGeom prst="rect">
+            <a:avLst/>
+          </a:prstGeom>
+          <a:solidFill>
+            <a:srgbClr val="1B2436"/>
+          </a:solidFill>
+          <a:ln>
+            <a:noFill/>
+          </a:ln>
+          <a:effectLst/>
+        </p:spPr>
+        <p:style>
+          <a:lnRef idx="1">
+            <a:schemeClr val="accent1"/>
+          </a:lnRef>
+          <a:fillRef idx="3">
+            <a:schemeClr val="accent1"/>
+          </a:fillRef>
+          <a:effectRef idx="2">
+            <a:schemeClr val="accent1"/>
+          </a:effectRef>
+          <a:fontRef idx="minor">
+            <a:schemeClr val="lt1"/>
+          </a:fontRef>
+        </p:style>
+        <p:txBody>
+          <a:bodyPr rtlCol="0" anchor="ctr"/>
+          <a:lstStyle/>
+          <a:p>
+            <a:pPr algn="ctr"/>
+          </a:p>
+        </p:txBody>
+      </p:sp>
       <p:sp>
         <p:nvSpPr>
           <p:cNvPr id="7" name="Title 6">
@@ -9469,6 +9677,14 @@
 <file path=ppt/slides/slide6.xml><?xml version="1.0" encoding="utf-8"?>
 <p:sld xmlns:a="http://schemas.openxmlformats.org/drawingml/2006/main" xmlns:r="http://schemas.openxmlformats.org/officeDocument/2006/relationships" xmlns:p="http://schemas.openxmlformats.org/presentationml/2006/main">
   <p:cSld>
+    <p:bg>
+      <p:bgPr>
+        <a:solidFill>
+          <a:srgbClr val="FFFFFF"/>
+        </a:solidFill>
+        <a:effectLst/>
+      </p:bgPr>
+    </p:bg>
     <p:spTree>
       <p:nvGrpSpPr>
         <p:cNvPr id="1" name=""/>
@@ -9483,6 +9699,50 @@
           <a:chExt cx="0" cy="0"/>
         </a:xfrm>
       </p:grpSpPr>
+      <p:sp>
+        <p:nvSpPr>
+          <p:cNvPr id="14" name="Rectangle 13"/>
+          <p:cNvSpPr/>
+          <p:nvPr/>
+        </p:nvSpPr>
+        <p:spPr>
+          <a:xfrm>
+            <a:off x="0" y="0"/>
+            <a:ext cx="12188952" cy="1051560"/>
+          </a:xfrm>
+          <a:prstGeom prst="rect">
+            <a:avLst/>
+          </a:prstGeom>
+          <a:solidFill>
+            <a:srgbClr val="1B2436"/>
+          </a:solidFill>
+          <a:ln>
+            <a:noFill/>
+          </a:ln>
+          <a:effectLst/>
+        </p:spPr>
+        <p:style>
+          <a:lnRef idx="1">
+            <a:schemeClr val="accent1"/>
+          </a:lnRef>
+          <a:fillRef idx="3">
+            <a:schemeClr val="accent1"/>
+          </a:fillRef>
+          <a:effectRef idx="2">
+            <a:schemeClr val="accent1"/>
+          </a:effectRef>
+          <a:fontRef idx="minor">
+            <a:schemeClr val="lt1"/>
+          </a:fontRef>
+        </p:style>
+        <p:txBody>
+          <a:bodyPr rtlCol="0" anchor="ctr"/>
+          <a:lstStyle/>
+          <a:p>
+            <a:pPr algn="ctr"/>
+          </a:p>
+        </p:txBody>
+      </p:sp>
       <p:sp>
         <p:nvSpPr>
           <p:cNvPr id="7" name="Title 6">
@@ -10482,6 +10742,14 @@
 <file path=ppt/slides/slide7.xml><?xml version="1.0" encoding="utf-8"?>
 <p:sld xmlns:a="http://schemas.openxmlformats.org/drawingml/2006/main" xmlns:r="http://schemas.openxmlformats.org/officeDocument/2006/relationships" xmlns:p="http://schemas.openxmlformats.org/presentationml/2006/main">
   <p:cSld>
+    <p:bg>
+      <p:bgPr>
+        <a:solidFill>
+          <a:srgbClr val="FFFFFF"/>
+        </a:solidFill>
+        <a:effectLst/>
+      </p:bgPr>
+    </p:bg>
     <p:spTree>
       <p:nvGrpSpPr>
         <p:cNvPr id="1" name="">
@@ -10502,6 +10770,50 @@
           <a:chExt cx="0" cy="0"/>
         </a:xfrm>
       </p:grpSpPr>
+      <p:sp>
+        <p:nvSpPr>
+          <p:cNvPr id="13" name="Rectangle 12"/>
+          <p:cNvSpPr/>
+          <p:nvPr/>
+        </p:nvSpPr>
+        <p:spPr>
+          <a:xfrm>
+            <a:off x="0" y="0"/>
+            <a:ext cx="12188952" cy="1051560"/>
+          </a:xfrm>
+          <a:prstGeom prst="rect">
+            <a:avLst/>
+          </a:prstGeom>
+          <a:solidFill>
+            <a:srgbClr val="1B2436"/>
+          </a:solidFill>
+          <a:ln>
+            <a:noFill/>
+          </a:ln>
+          <a:effectLst/>
+        </p:spPr>
+        <p:style>
+          <a:lnRef idx="1">
+            <a:schemeClr val="accent1"/>
+          </a:lnRef>
+          <a:fillRef idx="3">
+            <a:schemeClr val="accent1"/>
+          </a:fillRef>
+          <a:effectRef idx="2">
+            <a:schemeClr val="accent1"/>
+          </a:effectRef>
+          <a:fontRef idx="minor">
+            <a:schemeClr val="lt1"/>
+          </a:fontRef>
+        </p:style>
+        <p:txBody>
+          <a:bodyPr rtlCol="0" anchor="ctr"/>
+          <a:lstStyle/>
+          <a:p>
+            <a:pPr algn="ctr"/>
+          </a:p>
+        </p:txBody>
+      </p:sp>
       <p:sp>
         <p:nvSpPr>
           <p:cNvPr id="7" name="Title 6">
@@ -11189,6 +11501,14 @@
 <file path=ppt/slides/slide8.xml><?xml version="1.0" encoding="utf-8"?>
 <p:sld xmlns:a="http://schemas.openxmlformats.org/drawingml/2006/main" xmlns:r="http://schemas.openxmlformats.org/officeDocument/2006/relationships" xmlns:p="http://schemas.openxmlformats.org/presentationml/2006/main">
   <p:cSld>
+    <p:bg>
+      <p:bgPr>
+        <a:solidFill>
+          <a:srgbClr val="FFFFFF"/>
+        </a:solidFill>
+        <a:effectLst/>
+      </p:bgPr>
+    </p:bg>
     <p:spTree>
       <p:nvGrpSpPr>
         <p:cNvPr id="1" name="">
@@ -11209,6 +11529,50 @@
           <a:chExt cx="0" cy="0"/>
         </a:xfrm>
       </p:grpSpPr>
+      <p:sp>
+        <p:nvSpPr>
+          <p:cNvPr id="29" name="Rectangle 28"/>
+          <p:cNvSpPr/>
+          <p:nvPr/>
+        </p:nvSpPr>
+        <p:spPr>
+          <a:xfrm>
+            <a:off x="0" y="0"/>
+            <a:ext cx="12188952" cy="1051560"/>
+          </a:xfrm>
+          <a:prstGeom prst="rect">
+            <a:avLst/>
+          </a:prstGeom>
+          <a:solidFill>
+            <a:srgbClr val="1B2436"/>
+          </a:solidFill>
+          <a:ln>
+            <a:noFill/>
+          </a:ln>
+          <a:effectLst/>
+        </p:spPr>
+        <p:style>
+          <a:lnRef idx="1">
+            <a:schemeClr val="accent1"/>
+          </a:lnRef>
+          <a:fillRef idx="3">
+            <a:schemeClr val="accent1"/>
+          </a:fillRef>
+          <a:effectRef idx="2">
+            <a:schemeClr val="accent1"/>
+          </a:effectRef>
+          <a:fontRef idx="minor">
+            <a:schemeClr val="lt1"/>
+          </a:fontRef>
+        </p:style>
+        <p:txBody>
+          <a:bodyPr rtlCol="0" anchor="ctr"/>
+          <a:lstStyle/>
+          <a:p>
+            <a:pPr algn="ctr"/>
+          </a:p>
+        </p:txBody>
+      </p:sp>
       <p:sp>
         <p:nvSpPr>
           <p:cNvPr id="4" name="Rectangle 2">
@@ -12609,6 +12973,14 @@
 <file path=ppt/slides/slide9.xml><?xml version="1.0" encoding="utf-8"?>
 <p:sld xmlns:a="http://schemas.openxmlformats.org/drawingml/2006/main" xmlns:r="http://schemas.openxmlformats.org/officeDocument/2006/relationships" xmlns:p="http://schemas.openxmlformats.org/presentationml/2006/main">
   <p:cSld>
+    <p:bg>
+      <p:bgPr>
+        <a:solidFill>
+          <a:srgbClr val="FFFFFF"/>
+        </a:solidFill>
+        <a:effectLst/>
+      </p:bgPr>
+    </p:bg>
     <p:spTree>
       <p:nvGrpSpPr>
         <p:cNvPr id="1" name=""/>
@@ -12623,6 +12995,50 @@
           <a:chExt cx="0" cy="0"/>
         </a:xfrm>
       </p:grpSpPr>
+      <p:sp>
+        <p:nvSpPr>
+          <p:cNvPr id="21" name="Rectangle 20"/>
+          <p:cNvSpPr/>
+          <p:nvPr/>
+        </p:nvSpPr>
+        <p:spPr>
+          <a:xfrm>
+            <a:off x="0" y="0"/>
+            <a:ext cx="12188952" cy="1051560"/>
+          </a:xfrm>
+          <a:prstGeom prst="rect">
+            <a:avLst/>
+          </a:prstGeom>
+          <a:solidFill>
+            <a:srgbClr val="1B2436"/>
+          </a:solidFill>
+          <a:ln>
+            <a:noFill/>
+          </a:ln>
+          <a:effectLst/>
+        </p:spPr>
+        <p:style>
+          <a:lnRef idx="1">
+            <a:schemeClr val="accent1"/>
+          </a:lnRef>
+          <a:fillRef idx="3">
+            <a:schemeClr val="accent1"/>
+          </a:fillRef>
+          <a:effectRef idx="2">
+            <a:schemeClr val="accent1"/>
+          </a:effectRef>
+          <a:fontRef idx="minor">
+            <a:schemeClr val="lt1"/>
+          </a:fontRef>
+        </p:style>
+        <p:txBody>
+          <a:bodyPr rtlCol="0" anchor="ctr"/>
+          <a:lstStyle/>
+          <a:p>
+            <a:pPr algn="ctr"/>
+          </a:p>
+        </p:txBody>
+      </p:sp>
       <p:sp>
         <p:nvSpPr>
           <p:cNvPr id="3" name="Content Placeholder 2">

--- a/pptx-report/template.pptx
+++ b/pptx-report/template.pptx
@@ -5027,6 +5027,14 @@
 <file path=ppt/slides/slide1.xml><?xml version="1.0" encoding="utf-8"?>
 <p:sld xmlns:a="http://schemas.openxmlformats.org/drawingml/2006/main" xmlns:r="http://schemas.openxmlformats.org/officeDocument/2006/relationships" xmlns:p="http://schemas.openxmlformats.org/presentationml/2006/main">
   <p:cSld>
+    <p:bg>
+      <p:bgPr>
+        <a:solidFill>
+          <a:srgbClr val="1B2436"/>
+        </a:solidFill>
+        <a:effectLst/>
+      </p:bgPr>
+    </p:bg>
     <p:spTree>
       <p:nvGrpSpPr>
         <p:cNvPr id="1" name=""/>
@@ -5102,7 +5110,7 @@
             <a:r>
               <a:rPr lang="tr-TR" b="1" dirty="0">
                 <a:solidFill>
-                  <a:schemeClr val="tx1"/>
+                  <a:srgbClr val="FFFFFF"/>
                 </a:solidFill>
                 <a:latin typeface="Slack-Lato"/>
               </a:rPr>
@@ -5111,7 +5119,7 @@
             <a:r>
               <a:rPr lang="tr-TR" b="1" dirty="0" err="1">
                 <a:solidFill>
-                  <a:schemeClr val="tx1"/>
+                  <a:srgbClr val="FFFFFF"/>
                 </a:solidFill>
                 <a:latin typeface="Slack-Lato"/>
               </a:rPr>
@@ -5120,7 +5128,7 @@
             <a:r>
               <a:rPr lang="en-US" b="1" i="0" dirty="0">
                 <a:solidFill>
-                  <a:schemeClr val="tx1"/>
+                  <a:srgbClr val="FFFFFF"/>
                 </a:solidFill>
                 <a:effectLst/>
                 <a:latin typeface="Slack-Lato"/>
@@ -5130,7 +5138,7 @@
             <a:r>
               <a:rPr lang="en-US" b="1" i="0" dirty="0" err="1">
                 <a:solidFill>
-                  <a:schemeClr val="tx1"/>
+                  <a:srgbClr val="FFFFFF"/>
                 </a:solidFill>
                 <a:effectLst/>
                 <a:latin typeface="Slack-Lato"/>
@@ -5140,7 +5148,7 @@
             <a:r>
               <a:rPr lang="en-US" b="1" i="0" dirty="0">
                 <a:solidFill>
-                  <a:schemeClr val="tx1"/>
+                  <a:srgbClr val="FFFFFF"/>
                 </a:solidFill>
                 <a:effectLst/>
                 <a:latin typeface="Slack-Lato"/>
@@ -5150,7 +5158,7 @@
             <a:r>
               <a:rPr lang="tr-TR" b="1" i="0" dirty="0">
                 <a:solidFill>
-                  <a:schemeClr val="tx1"/>
+                  <a:srgbClr val="FFFFFF"/>
                 </a:solidFill>
                 <a:effectLst/>
                 <a:latin typeface="Slack-Lato"/>
@@ -5160,7 +5168,7 @@
             <a:r>
               <a:rPr lang="en-US" b="1" i="0" dirty="0">
                 <a:solidFill>
-                  <a:schemeClr val="tx1"/>
+                  <a:srgbClr val="FFFFFF"/>
                 </a:solidFill>
                 <a:effectLst/>
                 <a:latin typeface="Slack-Lato"/>
@@ -5170,7 +5178,7 @@
             <a:r>
               <a:rPr lang="tr-TR" b="1" dirty="0">
                 <a:solidFill>
-                  <a:schemeClr val="tx1"/>
+                  <a:srgbClr val="FFFFFF"/>
                 </a:solidFill>
                 <a:latin typeface="Slack-Lato"/>
               </a:rPr>
@@ -5220,6 +5228,40 @@
           </a:prstGeom>
         </p:spPr>
       </p:pic>
+      <p:sp>
+        <p:nvSpPr>
+          <p:cNvPr id="5" name="TextBox 4"/>
+          <p:cNvSpPr txBox="1"/>
+          <p:nvPr/>
+        </p:nvSpPr>
+        <p:spPr>
+          <a:xfrm>
+            <a:off x="1097280" y="5577840"/>
+            <a:ext cx="10058400" cy="1005840"/>
+          </a:xfrm>
+          <a:prstGeom prst="rect">
+            <a:avLst/>
+          </a:prstGeom>
+          <a:noFill/>
+        </p:spPr>
+        <p:txBody>
+          <a:bodyPr wrap="square">
+            <a:spAutoFit/>
+          </a:bodyPr>
+          <a:lstStyle/>
+          <a:p>
+            <a:pPr algn="ctr"/>
+            <a:r>
+              <a:rPr sz="1200" i="1">
+                <a:solidFill>
+                  <a:srgbClr val="8A93A6"/>
+                </a:solidFill>
+              </a:rPr>
+              <a:t>(Yorum / not eklemek için buraya tıklayın)</a:t>
+            </a:r>
+          </a:p>
+        </p:txBody>
+      </p:sp>
     </p:spTree>
     <p:extLst>
       <p:ext uri="{BB962C8B-B14F-4D97-AF65-F5344CB8AC3E}">

--- a/pptx-report/template.pptx
+++ b/pptx-report/template.pptx
@@ -5228,40 +5228,6 @@
           </a:prstGeom>
         </p:spPr>
       </p:pic>
-      <p:sp>
-        <p:nvSpPr>
-          <p:cNvPr id="5" name="TextBox 4"/>
-          <p:cNvSpPr txBox="1"/>
-          <p:nvPr/>
-        </p:nvSpPr>
-        <p:spPr>
-          <a:xfrm>
-            <a:off x="1097280" y="5577840"/>
-            <a:ext cx="10058400" cy="1005840"/>
-          </a:xfrm>
-          <a:prstGeom prst="rect">
-            <a:avLst/>
-          </a:prstGeom>
-          <a:noFill/>
-        </p:spPr>
-        <p:txBody>
-          <a:bodyPr wrap="square">
-            <a:spAutoFit/>
-          </a:bodyPr>
-          <a:lstStyle/>
-          <a:p>
-            <a:pPr algn="ctr"/>
-            <a:r>
-              <a:rPr sz="1200" i="1">
-                <a:solidFill>
-                  <a:srgbClr val="8A93A6"/>
-                </a:solidFill>
-              </a:rPr>
-              <a:t>(Yorum / not eklemek için buraya tıklayın)</a:t>
-            </a:r>
-          </a:p>
-        </p:txBody>
-      </p:sp>
     </p:spTree>
     <p:extLst>
       <p:ext uri="{BB962C8B-B14F-4D97-AF65-F5344CB8AC3E}">
@@ -5593,8 +5559,8 @@
         </p:blipFill>
         <p:spPr>
           <a:xfrm>
-            <a:off x="8839750" y="253133"/>
-            <a:ext cx="2255145" cy="539126"/>
+            <a:off x="9536615" y="274320"/>
+            <a:ext cx="2103696" cy="502920"/>
           </a:xfrm>
           <a:prstGeom prst="rect">
             <a:avLst/>
@@ -5629,8 +5595,8 @@
         </p:blipFill>
         <p:spPr>
           <a:xfrm>
-            <a:off x="4144766" y="171000"/>
-            <a:ext cx="2420020" cy="623155"/>
+            <a:off x="548640" y="274320"/>
+            <a:ext cx="1953087" cy="502920"/>
           </a:xfrm>
           <a:prstGeom prst="rect">
             <a:avLst/>
@@ -5665,8 +5631,8 @@
         </p:blipFill>
         <p:spPr>
           <a:xfrm>
-            <a:off x="-9934" y="51305"/>
-            <a:ext cx="2703776" cy="866112"/>
+            <a:off x="5309483" y="274320"/>
+            <a:ext cx="1569985" cy="502920"/>
           </a:xfrm>
           <a:prstGeom prst="rect">
             <a:avLst/>
@@ -6211,6 +6177,40 @@
             <a:endParaRPr lang="en-US" sz="1000" dirty="0">
               <a:latin typeface="Arial" panose="020B0604020202020204" pitchFamily="34" charset="0"/>
             </a:endParaRPr>
+          </a:p>
+        </p:txBody>
+      </p:sp>
+      <p:sp>
+        <p:nvSpPr>
+          <p:cNvPr id="33" name="TextBox 32"/>
+          <p:cNvSpPr txBox="1"/>
+          <p:nvPr/>
+        </p:nvSpPr>
+        <p:spPr>
+          <a:xfrm>
+            <a:off x="9829800" y="5394960"/>
+            <a:ext cx="2258568" cy="384048"/>
+          </a:xfrm>
+          <a:prstGeom prst="rect">
+            <a:avLst/>
+          </a:prstGeom>
+          <a:noFill/>
+        </p:spPr>
+        <p:txBody>
+          <a:bodyPr wrap="square">
+            <a:spAutoFit/>
+          </a:bodyPr>
+          <a:lstStyle/>
+          <a:p>
+            <a:pPr algn="ctr"/>
+            <a:r>
+              <a:rPr sz="900" i="1">
+                <a:solidFill>
+                  <a:srgbClr val="9CA3AF"/>
+                </a:solidFill>
+              </a:rPr>
+              <a:t>(Yorum eklemek için tıklayın)</a:t>
+            </a:r>
           </a:p>
         </p:txBody>
       </p:sp>
@@ -6544,8 +6544,8 @@
         </p:blipFill>
         <p:spPr>
           <a:xfrm>
-            <a:off x="9322407" y="313374"/>
-            <a:ext cx="2255145" cy="539126"/>
+            <a:off x="9536615" y="274320"/>
+            <a:ext cx="2103696" cy="502920"/>
           </a:xfrm>
           <a:prstGeom prst="rect">
             <a:avLst/>
@@ -6580,8 +6580,8 @@
         </p:blipFill>
         <p:spPr>
           <a:xfrm>
-            <a:off x="4744608" y="264161"/>
-            <a:ext cx="2420020" cy="623155"/>
+            <a:off x="548640" y="274320"/>
+            <a:ext cx="1953087" cy="502920"/>
           </a:xfrm>
           <a:prstGeom prst="rect">
             <a:avLst/>
@@ -6616,8 +6616,8 @@
         </p:blipFill>
         <p:spPr>
           <a:xfrm>
-            <a:off x="0" y="-14396"/>
-            <a:ext cx="3684494" cy="1180270"/>
+            <a:off x="5309483" y="274320"/>
+            <a:ext cx="1569985" cy="502920"/>
           </a:xfrm>
           <a:prstGeom prst="rect">
             <a:avLst/>
@@ -6952,8 +6952,8 @@
         </p:blipFill>
         <p:spPr bwMode="auto">
           <a:xfrm>
-            <a:off x="4699287" y="132784"/>
-            <a:ext cx="1765861" cy="630665"/>
+            <a:off x="548640" y="274320"/>
+            <a:ext cx="1953087" cy="502920"/>
           </a:xfrm>
           <a:prstGeom prst="rect">
             <a:avLst/>
@@ -6998,8 +6998,8 @@
         </p:blipFill>
         <p:spPr>
           <a:xfrm>
-            <a:off x="9089422" y="112195"/>
-            <a:ext cx="2557502" cy="613493"/>
+            <a:off x="9536615" y="274320"/>
+            <a:ext cx="2103696" cy="502920"/>
           </a:xfrm>
           <a:prstGeom prst="rect">
             <a:avLst/>
@@ -7034,8 +7034,8 @@
         </p:blipFill>
         <p:spPr>
           <a:xfrm>
-            <a:off x="-53787" y="-131447"/>
-            <a:ext cx="3436342" cy="1100778"/>
+            <a:off x="5309483" y="274320"/>
+            <a:ext cx="1569985" cy="502920"/>
           </a:xfrm>
           <a:prstGeom prst="rect">
             <a:avLst/>
@@ -9665,8 +9665,8 @@
         </p:blipFill>
         <p:spPr>
           <a:xfrm>
-            <a:off x="-100522" y="-145925"/>
-            <a:ext cx="3419475" cy="1095375"/>
+            <a:off x="5309483" y="274320"/>
+            <a:ext cx="1569985" cy="502920"/>
           </a:xfrm>
           <a:prstGeom prst="rect">
             <a:avLst/>
@@ -10012,8 +10012,8 @@
         </p:blipFill>
         <p:spPr bwMode="auto">
           <a:xfrm>
-            <a:off x="0" y="0"/>
-            <a:ext cx="1765861" cy="630665"/>
+            <a:off x="5117932" y="274320"/>
+            <a:ext cx="1953087" cy="502920"/>
           </a:xfrm>
           <a:prstGeom prst="rect">
             <a:avLst/>
@@ -11301,8 +11301,8 @@
         </p:blipFill>
         <p:spPr>
           <a:xfrm>
-            <a:off x="2743" y="0"/>
-            <a:ext cx="2189074" cy="525115"/>
+            <a:off x="5042627" y="274320"/>
+            <a:ext cx="2103696" cy="502920"/>
           </a:xfrm>
           <a:prstGeom prst="rect">
             <a:avLst/>
@@ -12080,8 +12080,8 @@
         </p:blipFill>
         <p:spPr>
           <a:xfrm>
-            <a:off x="8231793" y="51573"/>
-            <a:ext cx="2189074" cy="525115"/>
+            <a:off x="9536615" y="274320"/>
+            <a:ext cx="2103696" cy="502920"/>
           </a:xfrm>
           <a:prstGeom prst="rect">
             <a:avLst/>
@@ -12116,8 +12116,8 @@
         </p:blipFill>
         <p:spPr>
           <a:xfrm>
-            <a:off x="4274769" y="-100248"/>
-            <a:ext cx="2594501" cy="831108"/>
+            <a:off x="5309483" y="274320"/>
+            <a:ext cx="1569985" cy="502920"/>
           </a:xfrm>
           <a:prstGeom prst="rect">
             <a:avLst/>
@@ -12153,8 +12153,8 @@
         </p:blipFill>
         <p:spPr bwMode="auto">
           <a:xfrm>
-            <a:off x="615365" y="22798"/>
-            <a:ext cx="1765861" cy="630665"/>
+            <a:off x="548640" y="274320"/>
+            <a:ext cx="1953087" cy="502920"/>
           </a:xfrm>
           <a:prstGeom prst="rect">
             <a:avLst/>
@@ -14688,8 +14688,8 @@
         </p:blipFill>
         <p:spPr bwMode="auto">
           <a:xfrm>
-            <a:off x="4511513" y="-119"/>
-            <a:ext cx="1765861" cy="630665"/>
+            <a:off x="548640" y="274320"/>
+            <a:ext cx="1953087" cy="502920"/>
           </a:xfrm>
           <a:prstGeom prst="rect">
             <a:avLst/>
@@ -14734,8 +14734,8 @@
         </p:blipFill>
         <p:spPr>
           <a:xfrm>
-            <a:off x="8925531" y="100101"/>
-            <a:ext cx="2189074" cy="525115"/>
+            <a:off x="9536615" y="274320"/>
+            <a:ext cx="2103696" cy="502920"/>
           </a:xfrm>
           <a:prstGeom prst="rect">
             <a:avLst/>
@@ -14770,8 +14770,8 @@
         </p:blipFill>
         <p:spPr>
           <a:xfrm>
-            <a:off x="-18484" y="-91310"/>
-            <a:ext cx="3120752" cy="907939"/>
+            <a:off x="5309483" y="274320"/>
+            <a:ext cx="1569985" cy="502920"/>
           </a:xfrm>
           <a:prstGeom prst="rect">
             <a:avLst/>

--- a/pptx-report/template.pptx
+++ b/pptx-report/template.pptx
@@ -6953,7 +6953,7 @@
         <p:spPr bwMode="auto">
           <a:xfrm>
             <a:off x="548640" y="274320"/>
-            <a:ext cx="1953087" cy="502920"/>
+            <a:ext cx="1949782" cy="502920"/>
           </a:xfrm>
           <a:prstGeom prst="rect">
             <a:avLst/>
@@ -6998,8 +6998,8 @@
         </p:blipFill>
         <p:spPr>
           <a:xfrm>
-            <a:off x="9536615" y="274320"/>
-            <a:ext cx="2103696" cy="502920"/>
+            <a:off x="9537477" y="274320"/>
+            <a:ext cx="2102834" cy="502920"/>
           </a:xfrm>
           <a:prstGeom prst="rect">
             <a:avLst/>
@@ -7208,7 +7208,7 @@
         </p:nvSpPr>
         <p:spPr>
           <a:xfrm>
-            <a:off x="4520406" y="737302"/>
+            <a:off x="4520406" y="1097280"/>
             <a:ext cx="1943767" cy="448697"/>
           </a:xfrm>
         </p:spPr>
@@ -9803,7 +9803,7 @@
         </p:nvSpPr>
         <p:spPr>
           <a:xfrm>
-            <a:off x="4520406" y="849901"/>
+            <a:off x="4520406" y="1097280"/>
             <a:ext cx="3151187" cy="350838"/>
           </a:xfrm>
         </p:spPr>
@@ -10012,8 +10012,8 @@
         </p:blipFill>
         <p:spPr bwMode="auto">
           <a:xfrm>
-            <a:off x="5117932" y="274320"/>
-            <a:ext cx="1953087" cy="502920"/>
+            <a:off x="5119584" y="274320"/>
+            <a:ext cx="1949782" cy="502920"/>
           </a:xfrm>
           <a:prstGeom prst="rect">
             <a:avLst/>
@@ -10874,7 +10874,7 @@
         </p:nvSpPr>
         <p:spPr>
           <a:xfrm>
-            <a:off x="4820004" y="729106"/>
+            <a:off x="4820004" y="1097280"/>
             <a:ext cx="3151187" cy="350838"/>
           </a:xfrm>
         </p:spPr>
@@ -11301,8 +11301,8 @@
         </p:blipFill>
         <p:spPr>
           <a:xfrm>
-            <a:off x="5042627" y="274320"/>
-            <a:ext cx="2103696" cy="502920"/>
+            <a:off x="5043058" y="274320"/>
+            <a:ext cx="2102834" cy="502920"/>
           </a:xfrm>
           <a:prstGeom prst="rect">
             <a:avLst/>
@@ -11785,7 +11785,7 @@
         </p:nvSpPr>
         <p:spPr>
           <a:xfrm>
-            <a:off x="5084278" y="561841"/>
+            <a:off x="5084278" y="1097280"/>
             <a:ext cx="3151187" cy="350838"/>
           </a:xfrm>
           <a:prstGeom prst="rect">
@@ -12080,8 +12080,8 @@
         </p:blipFill>
         <p:spPr>
           <a:xfrm>
-            <a:off x="9536615" y="274320"/>
-            <a:ext cx="2103696" cy="502920"/>
+            <a:off x="9537477" y="274320"/>
+            <a:ext cx="2102834" cy="502920"/>
           </a:xfrm>
           <a:prstGeom prst="rect">
             <a:avLst/>
@@ -12154,7 +12154,7 @@
         <p:spPr bwMode="auto">
           <a:xfrm>
             <a:off x="548640" y="274320"/>
-            <a:ext cx="1953087" cy="502920"/>
+            <a:ext cx="1949782" cy="502920"/>
           </a:xfrm>
           <a:prstGeom prst="rect">
             <a:avLst/>
@@ -14689,7 +14689,7 @@
         <p:spPr bwMode="auto">
           <a:xfrm>
             <a:off x="548640" y="274320"/>
-            <a:ext cx="1953087" cy="502920"/>
+            <a:ext cx="1949782" cy="502920"/>
           </a:xfrm>
           <a:prstGeom prst="rect">
             <a:avLst/>
@@ -14734,8 +14734,8 @@
         </p:blipFill>
         <p:spPr>
           <a:xfrm>
-            <a:off x="9536615" y="274320"/>
-            <a:ext cx="2103696" cy="502920"/>
+            <a:off x="9537477" y="274320"/>
+            <a:ext cx="2102834" cy="502920"/>
           </a:xfrm>
           <a:prstGeom prst="rect">
             <a:avLst/>

--- a/pptx-report/template.pptx
+++ b/pptx-report/template.pptx
@@ -7208,8 +7208,8 @@
         </p:nvSpPr>
         <p:spPr>
           <a:xfrm>
-            <a:off x="4520406" y="1097280"/>
-            <a:ext cx="1943767" cy="448697"/>
+            <a:off x="4520406" y="786384"/>
+            <a:ext cx="1943767" cy="265176"/>
           </a:xfrm>
         </p:spPr>
         <p:txBody>
@@ -7219,7 +7219,11 @@
           <a:lstStyle/>
           <a:p>
             <a:r>
-              <a:rPr lang="tr-TR" sz="1600" b="1" dirty="0"/>
+              <a:rPr lang="tr-TR" sz="1600" b="1" dirty="0">
+                <a:solidFill>
+                  <a:srgbClr val="FFFFFF"/>
+                </a:solidFill>
+              </a:rPr>
               <a:t>Missed Chat</a:t>
             </a:r>
             <a:endParaRPr lang="en-US" sz="1600" b="1" dirty="0"/>
@@ -9803,8 +9807,8 @@
         </p:nvSpPr>
         <p:spPr>
           <a:xfrm>
-            <a:off x="4520406" y="1097280"/>
-            <a:ext cx="3151187" cy="350838"/>
+            <a:off x="4520406" y="786384"/>
+            <a:ext cx="3151187" cy="265176"/>
           </a:xfrm>
         </p:spPr>
         <p:txBody>
@@ -9814,7 +9818,11 @@
           <a:lstStyle/>
           <a:p>
             <a:r>
-              <a:rPr lang="tr-TR" sz="1600" b="1" dirty="0"/>
+              <a:rPr lang="tr-TR" sz="1600" b="1" dirty="0">
+                <a:solidFill>
+                  <a:srgbClr val="FFFFFF"/>
+                </a:solidFill>
+              </a:rPr>
               <a:t>Missed Chat</a:t>
             </a:r>
             <a:endParaRPr lang="en-US" sz="1600" b="1" dirty="0"/>
@@ -10874,8 +10882,8 @@
         </p:nvSpPr>
         <p:spPr>
           <a:xfrm>
-            <a:off x="4820004" y="1097280"/>
-            <a:ext cx="3151187" cy="350838"/>
+            <a:off x="4820004" y="786384"/>
+            <a:ext cx="3151187" cy="265176"/>
           </a:xfrm>
         </p:spPr>
         <p:txBody>
@@ -10885,7 +10893,11 @@
           <a:lstStyle/>
           <a:p>
             <a:r>
-              <a:rPr lang="tr-TR" sz="1600" b="1" dirty="0"/>
+              <a:rPr lang="tr-TR" sz="1600" b="1" dirty="0">
+                <a:solidFill>
+                  <a:srgbClr val="FFFFFF"/>
+                </a:solidFill>
+              </a:rPr>
               <a:t>Missed Chat</a:t>
             </a:r>
             <a:endParaRPr lang="en-US" sz="1600" b="1" dirty="0"/>
@@ -11785,8 +11797,8 @@
         </p:nvSpPr>
         <p:spPr>
           <a:xfrm>
-            <a:off x="5084278" y="1097280"/>
-            <a:ext cx="3151187" cy="350838"/>
+            <a:off x="5084278" y="786384"/>
+            <a:ext cx="3151187" cy="265176"/>
           </a:xfrm>
           <a:prstGeom prst="rect">
             <a:avLst/>
@@ -11820,13 +11832,19 @@
           </a:lstStyle>
           <a:p>
             <a:r>
-              <a:rPr lang="tr-TR" sz="2400" b="1" dirty="0">
+              <a:rPr lang="tr-TR" sz="1600" b="1" dirty="0">
+                <a:solidFill>
+                  <a:srgbClr val="FFFFFF"/>
+                </a:solidFill>
                 <a:latin typeface="+mn-lt"/>
               </a:rPr>
               <a:t>Top 10 </a:t>
             </a:r>
             <a:r>
-              <a:rPr lang="tr-TR" sz="2400" b="1" dirty="0" err="1">
+              <a:rPr lang="tr-TR" sz="1600" b="1" dirty="0" err="1">
+                <a:solidFill>
+                  <a:srgbClr val="FFFFFF"/>
+                </a:solidFill>
                 <a:latin typeface="+mn-lt"/>
               </a:rPr>
               <a:t>Tags</a:t>
